--- a/onboarding/presentaciones/ONB03_Tu_ecosistema_AT_WORK.pptx
+++ b/onboarding/presentaciones/ONB03_Tu_ecosistema_AT_WORK.pptx
@@ -685,7 +685,7 @@
           <a:p>
             <a:r>
               <a:rPr lang="en-US" dirty="0"/>
-              <a:t>La comunidad de WhatsApp es el espacio vivo entre sesiones.
+              <a:t>AT WORK Community, nuestra comunidad de WhatsApp, es el espacio vivo entre sesiones.
 Ahí vas a poder presentarte, compartir avances, hacer preguntas, pedir feedback cuando corresponda, conectar con otras alumnas y encontrar compañeras de práctica.
 La idea es que no todo quede en conversaciones privadas conmigo. Muchas dudas y aprendizajes pueden servirle también a otra persona que está atravesando un desafío parecido.</a:t>
             </a:r>
@@ -1047,7 +1047,7 @@
           <a:p>
             <a:r>
               <a:rPr lang="en-US" dirty="0"/>
-              <a:t>Tu siguiente paso es asegurarte de tener acceso a la comunidad y a tu carpeta personal.
+              <a:t>Tu siguiente paso es asegurarte de tener acceso a AT WORK Community y a tu carpeta personal.
 Y antes de seguir, confirma también que estás recibiendo correctamente los emails de AT WORK. Revisa tu bandeja de entrada, Spam y Promociones. Si encuentras un email ahí, marca el remitente como seguro o agrégalo a tus contactos para no perder avisos importantes.
 En las próximas clases te voy a mostrar cómo recorrer el programa y cómo utilizar estos espacios de manera concreta.</a:t>
             </a:r>
@@ -1864,7 +1864,7 @@
                 <a:ea typeface="Open Sans" pitchFamily="34" charset="-122"/>
                 <a:cs typeface="Open Sans" pitchFamily="34" charset="-120"/>
               </a:rPr>
-              <a:t>Comunidad de WhatsApp</a:t>
+              <a:t>AT WORK Community</a:t>
             </a:r>
             <a:endParaRPr lang="en-US" sz="1500" dirty="0"/>
           </a:p>
@@ -3071,7 +3071,7 @@
                 <a:ea typeface="Source Serif Pro" pitchFamily="34" charset="-122"/>
                 <a:cs typeface="Source Serif Pro" pitchFamily="34" charset="-120"/>
               </a:rPr>
-              <a:t>Comunidad de WhatsApp</a:t>
+              <a:t>AT WORK Community</a:t>
             </a:r>
             <a:endParaRPr lang="en-US" sz="3400" dirty="0"/>
           </a:p>
@@ -3086,7 +3086,7 @@
         <p:spPr>
           <a:xfrm>
             <a:off x="640080" y="2521712"/>
-            <a:ext cx="3291840" cy="365760"/>
+            <a:ext cx="3291840" cy="640080"/>
           </a:xfrm>
           <a:prstGeom prst="rect">
             <a:avLst/>
@@ -3110,7 +3110,7 @@
                 <a:ea typeface="Source Serif Pro" pitchFamily="34" charset="-122"/>
                 <a:cs typeface="Source Serif Pro" pitchFamily="34" charset="-120"/>
               </a:rPr>
-              <a:t>El espacio vivo entre sesiones</a:t>
+              <a:t>Nuestra comunidad de WhatsApp: el espacio vivo entre sesiones</a:t>
             </a:r>
             <a:endParaRPr lang="en-US" sz="1600" dirty="0"/>
           </a:p>
@@ -6774,7 +6774,7 @@
                 <a:ea typeface="Open Sans" pitchFamily="34" charset="-122"/>
                 <a:cs typeface="Open Sans" pitchFamily="34" charset="-120"/>
               </a:rPr>
-              <a:t>Asegúrate de tener acceso a la </a:t>
+              <a:t>Asegúrate de tener acceso a </a:t>
             </a:r>
             <a:pPr indent="0" marL="0">
               <a:buNone/>
@@ -6788,7 +6788,7 @@
                 <a:ea typeface="Open Sans" pitchFamily="34" charset="-122"/>
                 <a:cs typeface="Open Sans" pitchFamily="34" charset="-120"/>
               </a:rPr>
-              <a:t>comunidad</a:t>
+              <a:t>AT WORK Community</a:t>
             </a:r>
             <a:endParaRPr lang="en-US" sz="1650" dirty="0"/>
           </a:p>
